--- a/docs/archive/factorio_user_guide_2026-07-26_en.pptx
+++ b/docs/archive/factorio_user_guide_2026-07-26_en.pptx
@@ -4953,7 +4953,7 @@
                   <a:srgbClr val="14231B"/>
                 </a:solidFill>
               </a:rPr>
-              <a:t>•  Modelled on investly.co's autobidder.</a:t>
+              <a:t>•  Based on configurable portfolio limits and diversification rules.</a:t>
             </a:r>
           </a:p>
         </p:txBody>
